--- a/Praise To The Lord The Almighty-CH.pptx
+++ b/Praise To The Lord The Almighty-CH.pptx
@@ -264,7 +264,7 @@
           <a:p>
             <a:fld id="{E759A0DE-F190-5444-87AC-4719D5F20D15}" type="datetimeFigureOut">
               <a:rPr lang="en-US" smtClean="0"/>
-              <a:t>6/11/26</a:t>
+              <a:t>6/13/26</a:t>
             </a:fld>
             <a:endParaRPr lang="en-US"/>
           </a:p>
@@ -462,7 +462,7 @@
           <a:p>
             <a:fld id="{E759A0DE-F190-5444-87AC-4719D5F20D15}" type="datetimeFigureOut">
               <a:rPr lang="en-US" smtClean="0"/>
-              <a:t>6/11/26</a:t>
+              <a:t>6/13/26</a:t>
             </a:fld>
             <a:endParaRPr lang="en-US"/>
           </a:p>
@@ -670,7 +670,7 @@
           <a:p>
             <a:fld id="{E759A0DE-F190-5444-87AC-4719D5F20D15}" type="datetimeFigureOut">
               <a:rPr lang="en-US" smtClean="0"/>
-              <a:t>6/11/26</a:t>
+              <a:t>6/13/26</a:t>
             </a:fld>
             <a:endParaRPr lang="en-US"/>
           </a:p>
@@ -868,7 +868,7 @@
           <a:p>
             <a:fld id="{E759A0DE-F190-5444-87AC-4719D5F20D15}" type="datetimeFigureOut">
               <a:rPr lang="en-US" smtClean="0"/>
-              <a:t>6/11/26</a:t>
+              <a:t>6/13/26</a:t>
             </a:fld>
             <a:endParaRPr lang="en-US"/>
           </a:p>
@@ -1143,7 +1143,7 @@
           <a:p>
             <a:fld id="{E759A0DE-F190-5444-87AC-4719D5F20D15}" type="datetimeFigureOut">
               <a:rPr lang="en-US" smtClean="0"/>
-              <a:t>6/11/26</a:t>
+              <a:t>6/13/26</a:t>
             </a:fld>
             <a:endParaRPr lang="en-US"/>
           </a:p>
@@ -1408,7 +1408,7 @@
           <a:p>
             <a:fld id="{E759A0DE-F190-5444-87AC-4719D5F20D15}" type="datetimeFigureOut">
               <a:rPr lang="en-US" smtClean="0"/>
-              <a:t>6/11/26</a:t>
+              <a:t>6/13/26</a:t>
             </a:fld>
             <a:endParaRPr lang="en-US"/>
           </a:p>
@@ -1820,7 +1820,7 @@
           <a:p>
             <a:fld id="{E759A0DE-F190-5444-87AC-4719D5F20D15}" type="datetimeFigureOut">
               <a:rPr lang="en-US" smtClean="0"/>
-              <a:t>6/11/26</a:t>
+              <a:t>6/13/26</a:t>
             </a:fld>
             <a:endParaRPr lang="en-US"/>
           </a:p>
@@ -1961,7 +1961,7 @@
           <a:p>
             <a:fld id="{E759A0DE-F190-5444-87AC-4719D5F20D15}" type="datetimeFigureOut">
               <a:rPr lang="en-US" smtClean="0"/>
-              <a:t>6/11/26</a:t>
+              <a:t>6/13/26</a:t>
             </a:fld>
             <a:endParaRPr lang="en-US"/>
           </a:p>
@@ -2074,7 +2074,7 @@
           <a:p>
             <a:fld id="{E759A0DE-F190-5444-87AC-4719D5F20D15}" type="datetimeFigureOut">
               <a:rPr lang="en-US" smtClean="0"/>
-              <a:t>6/11/26</a:t>
+              <a:t>6/13/26</a:t>
             </a:fld>
             <a:endParaRPr lang="en-US"/>
           </a:p>
@@ -2385,7 +2385,7 @@
           <a:p>
             <a:fld id="{E759A0DE-F190-5444-87AC-4719D5F20D15}" type="datetimeFigureOut">
               <a:rPr lang="en-US" smtClean="0"/>
-              <a:t>6/11/26</a:t>
+              <a:t>6/13/26</a:t>
             </a:fld>
             <a:endParaRPr lang="en-US"/>
           </a:p>
@@ -2673,7 +2673,7 @@
           <a:p>
             <a:fld id="{E759A0DE-F190-5444-87AC-4719D5F20D15}" type="datetimeFigureOut">
               <a:rPr lang="en-US" smtClean="0"/>
-              <a:t>6/11/26</a:t>
+              <a:t>6/13/26</a:t>
             </a:fld>
             <a:endParaRPr lang="en-US"/>
           </a:p>
@@ -2914,7 +2914,7 @@
           <a:p>
             <a:fld id="{E759A0DE-F190-5444-87AC-4719D5F20D15}" type="datetimeFigureOut">
               <a:rPr lang="en-US" smtClean="0"/>
-              <a:t>6/11/26</a:t>
+              <a:t>6/13/26</a:t>
             </a:fld>
             <a:endParaRPr lang="en-US"/>
           </a:p>
@@ -3820,7 +3820,7 @@
                 <a:latin typeface="Avenir Medium" panose="02000503020000020003" pitchFamily="2" charset="0"/>
                 <a:ea typeface="Bodoni Ornaments" pitchFamily="2" charset="0"/>
               </a:rPr>
-              <a:t>G                                                         (Am)      Em         (D)</a:t>
+              <a:t>G                                                         Am      Em        </a:t>
             </a:r>
           </a:p>
           <a:p>
@@ -3846,7 +3846,7 @@
                 <a:latin typeface="Avenir Medium" panose="02000503020000020003" pitchFamily="2" charset="0"/>
                 <a:ea typeface="Bodoni Ornaments" pitchFamily="2" charset="0"/>
               </a:rPr>
-              <a:t>G                                                       (Am)            Em        (D)</a:t>
+              <a:t>G                                                        Am            Em        </a:t>
             </a:r>
           </a:p>
           <a:p>
@@ -3898,7 +3898,7 @@
                 <a:latin typeface="Avenir Medium" panose="02000503020000020003" pitchFamily="2" charset="0"/>
                 <a:ea typeface="Bodoni Ornaments" pitchFamily="2" charset="0"/>
               </a:rPr>
-              <a:t>C                            D</a:t>
+              <a:t>C                            D               G  Am Em C</a:t>
             </a:r>
           </a:p>
           <a:p>

--- a/Praise To The Lord The Almighty-CH.pptx
+++ b/Praise To The Lord The Almighty-CH.pptx
@@ -264,7 +264,7 @@
           <a:p>
             <a:fld id="{E759A0DE-F190-5444-87AC-4719D5F20D15}" type="datetimeFigureOut">
               <a:rPr lang="en-US" smtClean="0"/>
-              <a:t>6/13/26</a:t>
+              <a:t>7/4/26</a:t>
             </a:fld>
             <a:endParaRPr lang="en-US"/>
           </a:p>
@@ -462,7 +462,7 @@
           <a:p>
             <a:fld id="{E759A0DE-F190-5444-87AC-4719D5F20D15}" type="datetimeFigureOut">
               <a:rPr lang="en-US" smtClean="0"/>
-              <a:t>6/13/26</a:t>
+              <a:t>7/4/26</a:t>
             </a:fld>
             <a:endParaRPr lang="en-US"/>
           </a:p>
@@ -670,7 +670,7 @@
           <a:p>
             <a:fld id="{E759A0DE-F190-5444-87AC-4719D5F20D15}" type="datetimeFigureOut">
               <a:rPr lang="en-US" smtClean="0"/>
-              <a:t>6/13/26</a:t>
+              <a:t>7/4/26</a:t>
             </a:fld>
             <a:endParaRPr lang="en-US"/>
           </a:p>
@@ -868,7 +868,7 @@
           <a:p>
             <a:fld id="{E759A0DE-F190-5444-87AC-4719D5F20D15}" type="datetimeFigureOut">
               <a:rPr lang="en-US" smtClean="0"/>
-              <a:t>6/13/26</a:t>
+              <a:t>7/4/26</a:t>
             </a:fld>
             <a:endParaRPr lang="en-US"/>
           </a:p>
@@ -1143,7 +1143,7 @@
           <a:p>
             <a:fld id="{E759A0DE-F190-5444-87AC-4719D5F20D15}" type="datetimeFigureOut">
               <a:rPr lang="en-US" smtClean="0"/>
-              <a:t>6/13/26</a:t>
+              <a:t>7/4/26</a:t>
             </a:fld>
             <a:endParaRPr lang="en-US"/>
           </a:p>
@@ -1408,7 +1408,7 @@
           <a:p>
             <a:fld id="{E759A0DE-F190-5444-87AC-4719D5F20D15}" type="datetimeFigureOut">
               <a:rPr lang="en-US" smtClean="0"/>
-              <a:t>6/13/26</a:t>
+              <a:t>7/4/26</a:t>
             </a:fld>
             <a:endParaRPr lang="en-US"/>
           </a:p>
@@ -1820,7 +1820,7 @@
           <a:p>
             <a:fld id="{E759A0DE-F190-5444-87AC-4719D5F20D15}" type="datetimeFigureOut">
               <a:rPr lang="en-US" smtClean="0"/>
-              <a:t>6/13/26</a:t>
+              <a:t>7/4/26</a:t>
             </a:fld>
             <a:endParaRPr lang="en-US"/>
           </a:p>
@@ -1961,7 +1961,7 @@
           <a:p>
             <a:fld id="{E759A0DE-F190-5444-87AC-4719D5F20D15}" type="datetimeFigureOut">
               <a:rPr lang="en-US" smtClean="0"/>
-              <a:t>6/13/26</a:t>
+              <a:t>7/4/26</a:t>
             </a:fld>
             <a:endParaRPr lang="en-US"/>
           </a:p>
@@ -2074,7 +2074,7 @@
           <a:p>
             <a:fld id="{E759A0DE-F190-5444-87AC-4719D5F20D15}" type="datetimeFigureOut">
               <a:rPr lang="en-US" smtClean="0"/>
-              <a:t>6/13/26</a:t>
+              <a:t>7/4/26</a:t>
             </a:fld>
             <a:endParaRPr lang="en-US"/>
           </a:p>
@@ -2385,7 +2385,7 @@
           <a:p>
             <a:fld id="{E759A0DE-F190-5444-87AC-4719D5F20D15}" type="datetimeFigureOut">
               <a:rPr lang="en-US" smtClean="0"/>
-              <a:t>6/13/26</a:t>
+              <a:t>7/4/26</a:t>
             </a:fld>
             <a:endParaRPr lang="en-US"/>
           </a:p>
@@ -2673,7 +2673,7 @@
           <a:p>
             <a:fld id="{E759A0DE-F190-5444-87AC-4719D5F20D15}" type="datetimeFigureOut">
               <a:rPr lang="en-US" smtClean="0"/>
-              <a:t>6/13/26</a:t>
+              <a:t>7/4/26</a:t>
             </a:fld>
             <a:endParaRPr lang="en-US"/>
           </a:p>
@@ -2914,7 +2914,7 @@
           <a:p>
             <a:fld id="{E759A0DE-F190-5444-87AC-4719D5F20D15}" type="datetimeFigureOut">
               <a:rPr lang="en-US" smtClean="0"/>
-              <a:t>6/13/26</a:t>
+              <a:t>7/4/26</a:t>
             </a:fld>
             <a:endParaRPr lang="en-US"/>
           </a:p>
@@ -3820,7 +3820,7 @@
                 <a:latin typeface="Avenir Medium" panose="02000503020000020003" pitchFamily="2" charset="0"/>
                 <a:ea typeface="Bodoni Ornaments" pitchFamily="2" charset="0"/>
               </a:rPr>
-              <a:t>G                                                         Am      Em        </a:t>
+              <a:t>G                                                          Am             Em        </a:t>
             </a:r>
           </a:p>
           <a:p>
@@ -3846,7 +3846,7 @@
                 <a:latin typeface="Avenir Medium" panose="02000503020000020003" pitchFamily="2" charset="0"/>
                 <a:ea typeface="Bodoni Ornaments" pitchFamily="2" charset="0"/>
               </a:rPr>
-              <a:t>G                                                        Am            Em        </a:t>
+              <a:t>G                                                        Am                  Em        </a:t>
             </a:r>
           </a:p>
           <a:p>
@@ -3872,7 +3872,7 @@
                 <a:latin typeface="Avenir Medium" panose="02000503020000020003" pitchFamily="2" charset="0"/>
                 <a:ea typeface="Bodoni Ornaments" pitchFamily="2" charset="0"/>
               </a:rPr>
-              <a:t>C                                                                D</a:t>
+              <a:t>C                                                                 D</a:t>
             </a:r>
           </a:p>
           <a:p>
@@ -3898,7 +3898,7 @@
                 <a:latin typeface="Avenir Medium" panose="02000503020000020003" pitchFamily="2" charset="0"/>
                 <a:ea typeface="Bodoni Ornaments" pitchFamily="2" charset="0"/>
               </a:rPr>
-              <a:t>C                            D               G  Am Em C</a:t>
+              <a:t>C                                  D     G  Am Em C</a:t>
             </a:r>
           </a:p>
           <a:p>
@@ -4007,7 +4007,7 @@
                 <a:latin typeface="Avenir Medium" panose="02000503020000020003" pitchFamily="2" charset="0"/>
                 <a:ea typeface="Bodoni Ornaments" pitchFamily="2" charset="0"/>
               </a:rPr>
-              <a:t>G                                                                      (Am)       Em         (D)</a:t>
+              <a:t>G                                                                 Am              Em</a:t>
             </a:r>
             <a:endParaRPr lang="en-US" sz="2800" dirty="0">
               <a:solidFill>
@@ -4057,7 +4057,7 @@
                 <a:latin typeface="Avenir Medium" panose="02000503020000020003" pitchFamily="2" charset="0"/>
                 <a:ea typeface="Bodoni Ornaments" pitchFamily="2" charset="0"/>
               </a:rPr>
-              <a:t>G                                                            (Am)        Em         (D)</a:t>
+              <a:t>G                                                             Am           Em         </a:t>
             </a:r>
           </a:p>
           <a:p>
@@ -4100,7 +4100,7 @@
                 <a:latin typeface="Avenir Medium" panose="02000503020000020003" pitchFamily="2" charset="0"/>
                 <a:ea typeface="Bodoni Ornaments" pitchFamily="2" charset="0"/>
               </a:rPr>
-              <a:t>C                                                                D</a:t>
+              <a:t>C                                                                        D</a:t>
             </a:r>
           </a:p>
           <a:p>
@@ -4113,7 +4113,7 @@
                 <a:latin typeface="Avenir Medium" panose="02000503020000020003" pitchFamily="2" charset="0"/>
                 <a:ea typeface="Bodoni Ornaments" pitchFamily="2" charset="0"/>
               </a:rPr>
-              <a:t>Hast thou not seen how thy desires have been</a:t>
+              <a:t>Hast thou not seen how thy desires e’er have been</a:t>
             </a:r>
           </a:p>
           <a:p>
@@ -4126,7 +4126,7 @@
                 <a:latin typeface="Avenir Medium" panose="02000503020000020003" pitchFamily="2" charset="0"/>
                 <a:ea typeface="Bodoni Ornaments" pitchFamily="2" charset="0"/>
               </a:rPr>
-              <a:t>C                               D</a:t>
+              <a:t>C                               D             G  Am  Em  C</a:t>
             </a:r>
             <a:endParaRPr lang="en-US" sz="2800" dirty="0">
               <a:solidFill>
@@ -4262,7 +4262,7 @@
                 <a:latin typeface="Avenir Medium" panose="02000503020000020003" pitchFamily="2" charset="0"/>
                 <a:ea typeface="Bodoni Ornaments" pitchFamily="2" charset="0"/>
               </a:rPr>
-              <a:t>G                                                                         (Am)     Em         (D)</a:t>
+              <a:t>G                                                                 Am               Em</a:t>
             </a:r>
             <a:endParaRPr lang="en-US" sz="2800" dirty="0">
               <a:solidFill>
@@ -4295,7 +4295,7 @@
                 <a:latin typeface="Avenir Medium" panose="02000503020000020003" pitchFamily="2" charset="0"/>
                 <a:ea typeface="Bodoni Ornaments" pitchFamily="2" charset="0"/>
               </a:rPr>
-              <a:t>G                                                         (Am)     Em             (D)</a:t>
+              <a:t>G                                                          Am      Em             </a:t>
             </a:r>
             <a:endParaRPr lang="en-US" sz="2800" dirty="0">
               <a:solidFill>
@@ -4354,7 +4354,7 @@
                 <a:latin typeface="Avenir Medium" panose="02000503020000020003" pitchFamily="2" charset="0"/>
                 <a:ea typeface="Bodoni Ornaments" pitchFamily="2" charset="0"/>
               </a:rPr>
-              <a:t>C                                 D</a:t>
+              <a:t>C                                 D       G  Am  Em  C</a:t>
             </a:r>
           </a:p>
           <a:p>
@@ -4367,7 +4367,7 @@
                 <a:latin typeface="Avenir Medium" panose="02000503020000020003" pitchFamily="2" charset="0"/>
                 <a:ea typeface="Bodoni Ornaments" pitchFamily="2" charset="0"/>
               </a:rPr>
-              <a:t>If with His love He befriend thee.</a:t>
+              <a:t>If with His love He befriend thee</a:t>
             </a:r>
           </a:p>
         </p:txBody>
@@ -4463,7 +4463,7 @@
                 <a:latin typeface="Avenir Medium" panose="02000503020000020003" pitchFamily="2" charset="0"/>
                 <a:ea typeface="Bodoni Ornaments" pitchFamily="2" charset="0"/>
               </a:rPr>
-              <a:t>G                                                   (Am)     Em            (D)</a:t>
+              <a:t>G                                                     Am       Em</a:t>
             </a:r>
             <a:endParaRPr lang="en-US" sz="2800" dirty="0">
               <a:solidFill>
@@ -4496,7 +4496,7 @@
                 <a:latin typeface="Avenir Medium" panose="02000503020000020003" pitchFamily="2" charset="0"/>
                 <a:ea typeface="Bodoni Ornaments" pitchFamily="2" charset="0"/>
               </a:rPr>
-              <a:t>G                                                                      (Am)      Em           (D)</a:t>
+              <a:t>G                                                                      Am           Em</a:t>
             </a:r>
             <a:endParaRPr lang="en-US" sz="2800" dirty="0">
               <a:solidFill>
@@ -4529,7 +4529,7 @@
                 <a:latin typeface="Avenir Medium" panose="02000503020000020003" pitchFamily="2" charset="0"/>
                 <a:ea typeface="Bodoni Ornaments" pitchFamily="2" charset="0"/>
               </a:rPr>
-              <a:t>C                                                          D</a:t>
+              <a:t>C                                                           D</a:t>
             </a:r>
           </a:p>
           <a:p>
@@ -4555,7 +4555,7 @@
                 <a:latin typeface="Avenir Medium" panose="02000503020000020003" pitchFamily="2" charset="0"/>
                 <a:ea typeface="Bodoni Ornaments" pitchFamily="2" charset="0"/>
               </a:rPr>
-              <a:t>C                           D</a:t>
+              <a:t>C                           D        G  Am  Em  C</a:t>
             </a:r>
           </a:p>
           <a:p>
@@ -4664,7 +4664,7 @@
                 <a:latin typeface="Avenir Medium" panose="02000503020000020003" pitchFamily="2" charset="0"/>
                 <a:ea typeface="Bodoni Ornaments" pitchFamily="2" charset="0"/>
               </a:rPr>
-              <a:t>G                                                         (Am)      Em         (D)</a:t>
+              <a:t>G                                                          Am            Em</a:t>
             </a:r>
           </a:p>
           <a:p>
@@ -4690,8 +4690,25 @@
                 <a:latin typeface="Avenir Medium" panose="02000503020000020003" pitchFamily="2" charset="0"/>
                 <a:ea typeface="Bodoni Ornaments" pitchFamily="2" charset="0"/>
               </a:rPr>
-              <a:t>G                                                       (Am)            Em        (D)</a:t>
-            </a:r>
+              <a:t>G                                                        </a:t>
+            </a:r>
+            <a:r>
+              <a:rPr lang="en-US" sz="2800">
+                <a:solidFill>
+                  <a:srgbClr val="FFFF00"/>
+                </a:solidFill>
+                <a:latin typeface="Avenir Medium" panose="02000503020000020003" pitchFamily="2" charset="0"/>
+                <a:ea typeface="Bodoni Ornaments" pitchFamily="2" charset="0"/>
+              </a:rPr>
+              <a:t>Am                  Em</a:t>
+            </a:r>
+            <a:endParaRPr lang="en-US" sz="2800" dirty="0">
+              <a:solidFill>
+                <a:srgbClr val="FFFF00"/>
+              </a:solidFill>
+              <a:latin typeface="Avenir Medium" panose="02000503020000020003" pitchFamily="2" charset="0"/>
+              <a:ea typeface="Bodoni Ornaments" pitchFamily="2" charset="0"/>
+            </a:endParaRPr>
           </a:p>
           <a:p>
             <a:pPr algn="l"/>
@@ -4742,7 +4759,7 @@
                 <a:latin typeface="Avenir Medium" panose="02000503020000020003" pitchFamily="2" charset="0"/>
                 <a:ea typeface="Bodoni Ornaments" pitchFamily="2" charset="0"/>
               </a:rPr>
-              <a:t>C                            D</a:t>
+              <a:t>C                                    D     G  Am  Em  C (x2 end in G)</a:t>
             </a:r>
           </a:p>
           <a:p>
@@ -4756,6 +4773,48 @@
                 <a:ea typeface="Bodoni Ornaments" pitchFamily="2" charset="0"/>
               </a:rPr>
               <a:t>Praise Him in glad adoration</a:t>
+            </a:r>
+          </a:p>
+        </p:txBody>
+      </p:sp>
+      <p:sp>
+        <p:nvSpPr>
+          <p:cNvPr id="2" name="TextBox 1">
+            <a:extLst>
+              <a:ext uri="{FF2B5EF4-FFF2-40B4-BE49-F238E27FC236}">
+                <a16:creationId xmlns:a16="http://schemas.microsoft.com/office/drawing/2014/main" id="{4DF96C58-04C3-BBCD-0CE0-6C757C065163}"/>
+              </a:ext>
+            </a:extLst>
+          </p:cNvPr>
+          <p:cNvSpPr txBox="1"/>
+          <p:nvPr/>
+        </p:nvSpPr>
+        <p:spPr>
+          <a:xfrm>
+            <a:off x="10903875" y="6179950"/>
+            <a:ext cx="1210588" cy="707886"/>
+          </a:xfrm>
+          <a:prstGeom prst="rect">
+            <a:avLst/>
+          </a:prstGeom>
+          <a:noFill/>
+        </p:spPr>
+        <p:txBody>
+          <a:bodyPr wrap="none" rtlCol="0">
+            <a:spAutoFit/>
+          </a:bodyPr>
+          <a:lstStyle/>
+          <a:p>
+            <a:r>
+              <a:rPr lang="en-US" sz="4000" b="1" dirty="0">
+                <a:solidFill>
+                  <a:schemeClr val="tx2">
+                    <a:lumMod val="10000"/>
+                    <a:lumOff val="90000"/>
+                  </a:schemeClr>
+                </a:solidFill>
+              </a:rPr>
+              <a:t>END</a:t>
             </a:r>
           </a:p>
         </p:txBody>
